--- a/volunteer-coordination/VolunteerMatch_SolutionChallenge2026.pptx
+++ b/volunteer-coordination/VolunteerMatch_SolutionChallenge2026.pptx
@@ -3535,7 +3535,7 @@
                   <a:srgbClr val="FFFFFF"/>
                 </a:solidFill>
               </a:rPr>
-              <a:t>[Team Leader Name]</a:t>
+              <a:t>Hemant Godve</a:t>
             </a:r>
           </a:p>
           <a:p/>
